--- a/docs/songs/endless hallelujah.pptx
+++ b/docs/songs/endless hallelujah.pptx
@@ -216,7 +216,7 @@
           <a:p>
             <a:fld id="{C57EAEFC-A9C7-464E-BE3F-33D4DD72E122}" type="datetimeFigureOut">
               <a:rPr lang="en-GB" smtClean="0"/>
-              <a:t>06/02/2026</a:t>
+              <a:t>05/03/2026</a:t>
             </a:fld>
             <a:endParaRPr lang="en-GB"/>
           </a:p>
@@ -666,7 +666,7 @@
             <a:fld id="{26EA1CF3-4A15-4CBF-9A5A-6A56C368BE71}" type="datetimeFigureOut">
               <a:rPr lang="en-GB" smtClean="0"/>
               <a:pPr/>
-              <a:t>06/02/2026</a:t>
+              <a:t>05/03/2026</a:t>
             </a:fld>
             <a:endParaRPr lang="en-GB"/>
           </a:p>
@@ -833,7 +833,7 @@
             <a:fld id="{26EA1CF3-4A15-4CBF-9A5A-6A56C368BE71}" type="datetimeFigureOut">
               <a:rPr lang="en-GB" smtClean="0"/>
               <a:pPr/>
-              <a:t>06/02/2026</a:t>
+              <a:t>05/03/2026</a:t>
             </a:fld>
             <a:endParaRPr lang="en-GB"/>
           </a:p>
@@ -1010,7 +1010,7 @@
             <a:fld id="{26EA1CF3-4A15-4CBF-9A5A-6A56C368BE71}" type="datetimeFigureOut">
               <a:rPr lang="en-GB" smtClean="0"/>
               <a:pPr/>
-              <a:t>06/02/2026</a:t>
+              <a:t>05/03/2026</a:t>
             </a:fld>
             <a:endParaRPr lang="en-GB"/>
           </a:p>
@@ -1177,7 +1177,7 @@
             <a:fld id="{26EA1CF3-4A15-4CBF-9A5A-6A56C368BE71}" type="datetimeFigureOut">
               <a:rPr lang="en-GB" smtClean="0"/>
               <a:pPr/>
-              <a:t>06/02/2026</a:t>
+              <a:t>05/03/2026</a:t>
             </a:fld>
             <a:endParaRPr lang="en-GB"/>
           </a:p>
@@ -1420,7 +1420,7 @@
             <a:fld id="{26EA1CF3-4A15-4CBF-9A5A-6A56C368BE71}" type="datetimeFigureOut">
               <a:rPr lang="en-GB" smtClean="0"/>
               <a:pPr/>
-              <a:t>06/02/2026</a:t>
+              <a:t>05/03/2026</a:t>
             </a:fld>
             <a:endParaRPr lang="en-GB"/>
           </a:p>
@@ -1705,7 +1705,7 @@
             <a:fld id="{26EA1CF3-4A15-4CBF-9A5A-6A56C368BE71}" type="datetimeFigureOut">
               <a:rPr lang="en-GB" smtClean="0"/>
               <a:pPr/>
-              <a:t>06/02/2026</a:t>
+              <a:t>05/03/2026</a:t>
             </a:fld>
             <a:endParaRPr lang="en-GB"/>
           </a:p>
@@ -2124,7 +2124,7 @@
             <a:fld id="{26EA1CF3-4A15-4CBF-9A5A-6A56C368BE71}" type="datetimeFigureOut">
               <a:rPr lang="en-GB" smtClean="0"/>
               <a:pPr/>
-              <a:t>06/02/2026</a:t>
+              <a:t>05/03/2026</a:t>
             </a:fld>
             <a:endParaRPr lang="en-GB"/>
           </a:p>
@@ -2239,7 +2239,7 @@
             <a:fld id="{26EA1CF3-4A15-4CBF-9A5A-6A56C368BE71}" type="datetimeFigureOut">
               <a:rPr lang="en-GB" smtClean="0"/>
               <a:pPr/>
-              <a:t>06/02/2026</a:t>
+              <a:t>05/03/2026</a:t>
             </a:fld>
             <a:endParaRPr lang="en-GB"/>
           </a:p>
@@ -2331,7 +2331,7 @@
             <a:fld id="{26EA1CF3-4A15-4CBF-9A5A-6A56C368BE71}" type="datetimeFigureOut">
               <a:rPr lang="en-GB" smtClean="0"/>
               <a:pPr/>
-              <a:t>06/02/2026</a:t>
+              <a:t>05/03/2026</a:t>
             </a:fld>
             <a:endParaRPr lang="en-GB"/>
           </a:p>
@@ -2605,7 +2605,7 @@
             <a:fld id="{26EA1CF3-4A15-4CBF-9A5A-6A56C368BE71}" type="datetimeFigureOut">
               <a:rPr lang="en-GB" smtClean="0"/>
               <a:pPr/>
-              <a:t>06/02/2026</a:t>
+              <a:t>05/03/2026</a:t>
             </a:fld>
             <a:endParaRPr lang="en-GB"/>
           </a:p>
@@ -2855,7 +2855,7 @@
             <a:fld id="{26EA1CF3-4A15-4CBF-9A5A-6A56C368BE71}" type="datetimeFigureOut">
               <a:rPr lang="en-GB" smtClean="0"/>
               <a:pPr/>
-              <a:t>06/02/2026</a:t>
+              <a:t>05/03/2026</a:t>
             </a:fld>
             <a:endParaRPr lang="en-GB"/>
           </a:p>
@@ -3064,7 +3064,7 @@
             <a:fld id="{26EA1CF3-4A15-4CBF-9A5A-6A56C368BE71}" type="datetimeFigureOut">
               <a:rPr lang="en-GB" smtClean="0"/>
               <a:pPr/>
-              <a:t>06/02/2026</a:t>
+              <a:t>05/03/2026</a:t>
             </a:fld>
             <a:endParaRPr lang="en-GB"/>
           </a:p>
